--- a/automation/reel-template-pack/23-every-option-in-10-seconds/carousel/Template 23 - Every option in 10 seconds - Carousel.pptx
+++ b/automation/reel-template-pack/23-every-option-in-10-seconds/carousel/Template 23 - Every option in 10 seconds - Carousel.pptx
@@ -4053,30 +4053,54 @@
           </a:prstGeom>
         </p:spPr>
       </p:pic>
-      <p:pic>
-        <p:nvPicPr>
-          <p:cNvPr id="4" name="every option" descr="002.png"/>
-          <p:cNvPicPr>
-            <a:picLocks noChangeAspect="1"/>
-          </p:cNvPicPr>
+      <p:sp>
+        <p:nvSpPr>
+          <p:cNvPr id="4" name="LETTERING: every option"/>
+          <p:cNvSpPr txBox="1"/>
           <p:nvPr/>
-        </p:nvPicPr>
-        <p:blipFill>
-          <a:blip r:embed="rId4"/>
-          <a:stretch>
-            <a:fillRect/>
-          </a:stretch>
-        </p:blipFill>
+        </p:nvSpPr>
         <p:spPr>
           <a:xfrm rot="120000">
-            <a:off x="790575" y="2090738"/>
-            <a:ext cx="8705850" cy="2105025"/>
+            <a:off x="942975" y="2286000"/>
+            <a:ext cx="8401050" cy="1714500"/>
           </a:xfrm>
           <a:prstGeom prst="rect">
             <a:avLst/>
           </a:prstGeom>
-        </p:spPr>
-      </p:pic>
+          <a:noFill/>
+        </p:spPr>
+        <p:txBody>
+          <a:bodyPr wrap="none" anchor="t" lIns="0" rIns="0" tIns="0" bIns="0">
+            <a:spAutoFit/>
+          </a:bodyPr>
+          <a:lstStyle/>
+          <a:p>
+            <a:pPr algn="ctr">
+              <a:lnSpc>
+                <a:spcPct val="120000"/>
+              </a:lnSpc>
+            </a:pPr>
+            <a:r>
+              <a:rPr sz="11250" i="0">
+                <a:solidFill>
+                  <a:srgbClr val="7A1732"/>
+                </a:solidFill>
+                <a:latin typeface="DM Serif Display"/>
+              </a:rPr>
+              <a:t>every </a:t>
+            </a:r>
+            <a:r>
+              <a:rPr sz="11250" i="1">
+                <a:solidFill>
+                  <a:srgbClr val="7A1732"/>
+                </a:solidFill>
+                <a:latin typeface="DM Serif Display"/>
+              </a:rPr>
+              <a:t>option</a:t>
+            </a:r>
+          </a:p>
+        </p:txBody>
+      </p:sp>
       <p:sp>
         <p:nvSpPr>
           <p:cNvPr id="5" name="TEXT: [in one swipe]"/>
@@ -4235,7 +4259,7 @@
       </p:pic>
       <p:pic>
         <p:nvPicPr>
-          <p:cNvPr id="3" name="glasses" descr="003.png"/>
+          <p:cNvPr id="3" name="glasses" descr="002.png"/>
           <p:cNvPicPr>
             <a:picLocks noChangeAspect="1"/>
           </p:cNvPicPr>
@@ -4257,54 +4281,56 @@
           </a:prstGeom>
         </p:spPr>
       </p:pic>
-      <p:pic>
-        <p:nvPicPr>
-          <p:cNvPr id="4" name="PHOTO: Option 5" descr="004.png"/>
-          <p:cNvPicPr>
-            <a:picLocks noChangeAspect="1"/>
-          </p:cNvPicPr>
+      <p:sp>
+        <p:nvSpPr>
+          <p:cNvPr id="4" name="PHOTO: Option 5"/>
+          <p:cNvSpPr/>
           <p:nvPr/>
-        </p:nvPicPr>
-        <p:blipFill>
-          <a:blip r:embed="rId4"/>
-          <a:stretch>
-            <a:fillRect/>
-          </a:stretch>
-        </p:blipFill>
-        <p:spPr>
-          <a:xfrm>
-            <a:off x="1135198" y="5973434"/>
+        </p:nvSpPr>
+        <p:spPr>
+          <a:xfrm rot="0">
+            <a:off x="1135197" y="5973434"/>
             <a:ext cx="3152775" cy="2590800"/>
           </a:xfrm>
           <a:prstGeom prst="ellipse">
             <a:avLst/>
           </a:prstGeom>
-        </p:spPr>
-      </p:pic>
-      <p:pic>
-        <p:nvPicPr>
-          <p:cNvPr id="5" name="PHOTO: Option 6" descr="004.png"/>
-          <p:cNvPicPr>
-            <a:picLocks noChangeAspect="1"/>
-          </p:cNvPicPr>
+          <a:blipFill rotWithShape="1">
+            <a:blip r:embed="rId4"/>
+            <a:stretch>
+              <a:fillRect/>
+            </a:stretch>
+          </a:blipFill>
+          <a:ln>
+            <a:noFill/>
+          </a:ln>
+        </p:spPr>
+      </p:sp>
+      <p:sp>
+        <p:nvSpPr>
+          <p:cNvPr id="5" name="PHOTO: Option 6"/>
+          <p:cNvSpPr/>
           <p:nvPr/>
-        </p:nvPicPr>
-        <p:blipFill>
-          <a:blip r:embed="rId4"/>
-          <a:stretch>
-            <a:fillRect/>
-          </a:stretch>
-        </p:blipFill>
-        <p:spPr>
-          <a:xfrm>
+        </p:nvSpPr>
+        <p:spPr>
+          <a:xfrm rot="0">
             <a:off x="5999027" y="5973434"/>
             <a:ext cx="3152775" cy="2590800"/>
           </a:xfrm>
           <a:prstGeom prst="ellipse">
             <a:avLst/>
           </a:prstGeom>
-        </p:spPr>
-      </p:pic>
+          <a:blipFill rotWithShape="1">
+            <a:blip r:embed="rId4"/>
+            <a:stretch>
+              <a:fillRect/>
+            </a:stretch>
+          </a:blipFill>
+          <a:ln>
+            <a:noFill/>
+          </a:ln>
+        </p:spPr>
+      </p:sp>
       <p:sp>
         <p:nvSpPr>
           <p:cNvPr id="6" name="TEXT: [can't decide?]"/>
@@ -4419,30 +4445,152 @@
           </a:p>
         </p:txBody>
       </p:sp>
-      <p:pic>
-        <p:nvPicPr>
-          <p:cNvPr id="8" name="arrow" descr="006.png"/>
-          <p:cNvPicPr>
-            <a:picLocks noChangeAspect="1"/>
-          </p:cNvPicPr>
+      <p:sp>
+        <p:nvSpPr>
+          <p:cNvPr id="8" name="arrow"/>
+          <p:cNvSpPr/>
           <p:nvPr/>
-        </p:nvPicPr>
-        <p:blipFill>
-          <a:blip r:embed="rId5"/>
-          <a:stretch>
-            <a:fillRect/>
-          </a:stretch>
-        </p:blipFill>
-        <p:spPr>
-          <a:xfrm rot="120000">
+        </p:nvSpPr>
+        <p:spPr>
+          <a:xfrm rot="-120000">
             <a:off x="5095875" y="12272962"/>
             <a:ext cx="1619250" cy="504825"/>
           </a:xfrm>
-          <a:prstGeom prst="rect">
+          <a:custGeom>
             <a:avLst/>
-          </a:prstGeom>
-        </p:spPr>
-      </p:pic>
+            <a:gdLst/>
+            <a:ahLst/>
+            <a:cxnLst/>
+            <a:rect l="0" t="0" r="r" b="b"/>
+            <a:pathLst>
+              <a:path w="1619250" h="504825">
+                <a:moveTo>
+                  <a:pt x="1257300" y="480450"/>
+                </a:moveTo>
+                <a:cubicBezTo>
+                  <a:pt x="1257300" y="466626"/>
+                  <a:pt x="1253177" y="458623"/>
+                  <a:pt x="1247775" y="461962"/>
+                </a:cubicBezTo>
+                <a:cubicBezTo>
+                  <a:pt x="1242536" y="465200"/>
+                  <a:pt x="1238235" y="460095"/>
+                  <a:pt x="1238218" y="450618"/>
+                </a:cubicBezTo>
+                <a:cubicBezTo>
+                  <a:pt x="1238201" y="441141"/>
+                  <a:pt x="1271222" y="402197"/>
+                  <a:pt x="1311598" y="364076"/>
+                </a:cubicBezTo>
+                <a:lnTo>
+                  <a:pt x="1385010" y="294765"/>
+                </a:lnTo>
+                <a:lnTo>
+                  <a:pt x="1266386" y="300090"/>
+                </a:lnTo>
+                <a:cubicBezTo>
+                  <a:pt x="1201143" y="303019"/>
+                  <a:pt x="950595" y="310034"/>
+                  <a:pt x="709612" y="315678"/>
+                </a:cubicBezTo>
+                <a:cubicBezTo>
+                  <a:pt x="468630" y="321323"/>
+                  <a:pt x="223235" y="328686"/>
+                  <a:pt x="164292" y="332039"/>
+                </a:cubicBezTo>
+                <a:cubicBezTo>
+                  <a:pt x="81649" y="336741"/>
+                  <a:pt x="57124" y="335412"/>
+                  <a:pt x="57135" y="326231"/>
+                </a:cubicBezTo>
+                <a:cubicBezTo>
+                  <a:pt x="57144" y="319190"/>
+                  <a:pt x="44728" y="314325"/>
+                  <a:pt x="26754" y="314324"/>
+                </a:cubicBezTo>
+                <a:cubicBezTo>
+                  <a:pt x="-1225" y="314324"/>
+                  <a:pt x="-2231" y="313294"/>
+                  <a:pt x="14096" y="301355"/>
+                </a:cubicBezTo>
+                <a:cubicBezTo>
+                  <a:pt x="39698" y="282634"/>
+                  <a:pt x="40970" y="257174"/>
+                  <a:pt x="16302" y="257175"/>
+                </a:cubicBezTo>
+                <a:cubicBezTo>
+                  <a:pt x="4858" y="257175"/>
+                  <a:pt x="89" y="253819"/>
+                  <a:pt x="5238" y="249388"/>
+                </a:cubicBezTo>
+                <a:cubicBezTo>
+                  <a:pt x="38131" y="221084"/>
+                  <a:pt x="254251" y="205225"/>
+                  <a:pt x="757237" y="194206"/>
+                </a:cubicBezTo>
+                <a:cubicBezTo>
+                  <a:pt x="909161" y="190878"/>
+                  <a:pt x="1109402" y="185468"/>
+                  <a:pt x="1202217" y="182184"/>
+                </a:cubicBezTo>
+                <a:lnTo>
+                  <a:pt x="1370973" y="176212"/>
+                </a:lnTo>
+                <a:lnTo>
+                  <a:pt x="1306992" y="128587"/>
+                </a:lnTo>
+                <a:cubicBezTo>
+                  <a:pt x="1271803" y="102393"/>
+                  <a:pt x="1242899" y="74533"/>
+                  <a:pt x="1242760" y="66675"/>
+                </a:cubicBezTo>
+                <a:cubicBezTo>
+                  <a:pt x="1242622" y="58816"/>
+                  <a:pt x="1239154" y="47029"/>
+                  <a:pt x="1235054" y="40481"/>
+                </a:cubicBezTo>
+                <a:cubicBezTo>
+                  <a:pt x="1224885" y="24237"/>
+                  <a:pt x="1235722" y="9152"/>
+                  <a:pt x="1252842" y="15722"/>
+                </a:cubicBezTo>
+                <a:cubicBezTo>
+                  <a:pt x="1260532" y="18673"/>
+                  <a:pt x="1266825" y="16343"/>
+                  <a:pt x="1266825" y="10544"/>
+                </a:cubicBezTo>
+                <a:cubicBezTo>
+                  <a:pt x="1266825" y="-9201"/>
+                  <a:pt x="1283898" y="-5"/>
+                  <a:pt x="1441695" y="104733"/>
+                </a:cubicBezTo>
+                <a:cubicBezTo>
+                  <a:pt x="1620939" y="223706"/>
+                  <a:pt x="1633427" y="237454"/>
+                  <a:pt x="1593675" y="272033"/>
+                </a:cubicBezTo>
+                <a:cubicBezTo>
+                  <a:pt x="1563065" y="298659"/>
+                  <a:pt x="1336730" y="468567"/>
+                  <a:pt x="1320437" y="477150"/>
+                </a:cubicBezTo>
+                <a:cubicBezTo>
+                  <a:pt x="1255250" y="511492"/>
+                  <a:pt x="1257300" y="511385"/>
+                  <a:pt x="1257300" y="480450"/>
+                </a:cubicBezTo>
+                <a:close/>
+              </a:path>
+            </a:pathLst>
+          </a:custGeom>
+          <a:solidFill>
+            <a:srgbClr val="7A1732"/>
+          </a:solidFill>
+          <a:ln>
+            <a:noFill/>
+          </a:ln>
+        </p:spPr>
+      </p:sp>
     </p:spTree>
   </p:cSld>
   <p:clrMapOvr>
@@ -4485,33 +4633,34 @@
           </a:prstGeom>
         </p:spPr>
       </p:pic>
-      <p:pic>
-        <p:nvPicPr>
-          <p:cNvPr id="3" name="PHOTO: Option 1 (fills the page)" descr="007.png"/>
-          <p:cNvPicPr>
-            <a:picLocks noChangeAspect="1"/>
-          </p:cNvPicPr>
+      <p:sp>
+        <p:nvSpPr>
+          <p:cNvPr id="3" name="PHOTO: Option 1 (fills the page)"/>
+          <p:cNvSpPr/>
           <p:nvPr/>
-        </p:nvPicPr>
-        <p:blipFill>
-          <a:blip r:embed="rId3"/>
-          <a:stretch>
-            <a:fillRect/>
-          </a:stretch>
-        </p:blipFill>
-        <p:spPr>
-          <a:xfrm>
+        </p:nvSpPr>
+        <p:spPr>
+          <a:xfrm rot="0">
             <a:off x="0" y="0"/>
             <a:ext cx="10287000" cy="13716000"/>
           </a:xfrm>
           <a:prstGeom prst="rect">
             <a:avLst/>
           </a:prstGeom>
-        </p:spPr>
-      </p:pic>
+          <a:blipFill rotWithShape="1">
+            <a:blip r:embed="rId3"/>
+            <a:stretch>
+              <a:fillRect/>
+            </a:stretch>
+          </a:blipFill>
+          <a:ln>
+            <a:noFill/>
+          </a:ln>
+        </p:spPr>
+      </p:sp>
       <p:pic>
         <p:nvPicPr>
-          <p:cNvPr id="4" name="paint chip" descr="008.png"/>
+          <p:cNvPr id="4" name="paint chip" descr="003.png"/>
           <p:cNvPicPr>
             <a:picLocks noChangeAspect="1"/>
           </p:cNvPicPr>
@@ -4632,57 +4781,59 @@
           </a:prstGeom>
         </p:spPr>
       </p:pic>
-      <p:pic>
-        <p:nvPicPr>
-          <p:cNvPr id="3" name="PHOTO: Option 2 (top half)" descr="009.png"/>
-          <p:cNvPicPr>
-            <a:picLocks noChangeAspect="1"/>
-          </p:cNvPicPr>
+      <p:sp>
+        <p:nvSpPr>
+          <p:cNvPr id="3" name="PHOTO: Option 2 (top half)"/>
+          <p:cNvSpPr/>
           <p:nvPr/>
-        </p:nvPicPr>
-        <p:blipFill>
-          <a:blip r:embed="rId3"/>
-          <a:stretch>
-            <a:fillRect/>
-          </a:stretch>
-        </p:blipFill>
-        <p:spPr>
-          <a:xfrm>
+        </p:nvSpPr>
+        <p:spPr>
+          <a:xfrm rot="0">
             <a:off x="0" y="0"/>
             <a:ext cx="10287000" cy="6858000"/>
           </a:xfrm>
           <a:prstGeom prst="rect">
             <a:avLst/>
           </a:prstGeom>
-        </p:spPr>
-      </p:pic>
-      <p:pic>
-        <p:nvPicPr>
-          <p:cNvPr id="4" name="PHOTO: Option 3 (bottom half)" descr="009.png"/>
-          <p:cNvPicPr>
-            <a:picLocks noChangeAspect="1"/>
-          </p:cNvPicPr>
+          <a:blipFill rotWithShape="1">
+            <a:blip r:embed="rId3"/>
+            <a:stretch>
+              <a:fillRect/>
+            </a:stretch>
+          </a:blipFill>
+          <a:ln>
+            <a:noFill/>
+          </a:ln>
+        </p:spPr>
+      </p:sp>
+      <p:sp>
+        <p:nvSpPr>
+          <p:cNvPr id="4" name="PHOTO: Option 3 (bottom half)"/>
+          <p:cNvSpPr/>
           <p:nvPr/>
-        </p:nvPicPr>
-        <p:blipFill>
-          <a:blip r:embed="rId3"/>
-          <a:stretch>
-            <a:fillRect/>
-          </a:stretch>
-        </p:blipFill>
-        <p:spPr>
-          <a:xfrm>
+        </p:nvSpPr>
+        <p:spPr>
+          <a:xfrm rot="0">
             <a:off x="0" y="6858000"/>
             <a:ext cx="10287000" cy="6858000"/>
           </a:xfrm>
           <a:prstGeom prst="rect">
             <a:avLst/>
           </a:prstGeom>
-        </p:spPr>
-      </p:pic>
+          <a:blipFill rotWithShape="1">
+            <a:blip r:embed="rId3"/>
+            <a:stretch>
+              <a:fillRect/>
+            </a:stretch>
+          </a:blipFill>
+          <a:ln>
+            <a:noFill/>
+          </a:ln>
+        </p:spPr>
+      </p:sp>
       <p:pic>
         <p:nvPicPr>
-          <p:cNvPr id="5" name="paint chip" descr="011.png"/>
+          <p:cNvPr id="5" name="paint chip" descr="004.png"/>
           <p:cNvPicPr>
             <a:picLocks noChangeAspect="1"/>
           </p:cNvPicPr>
@@ -4763,7 +4914,7 @@
       </p:sp>
       <p:pic>
         <p:nvPicPr>
-          <p:cNvPr id="7" name="paint chip" descr="012.png"/>
+          <p:cNvPr id="7" name="paint chip" descr="005.png"/>
           <p:cNvPicPr>
             <a:picLocks noChangeAspect="1"/>
           </p:cNvPicPr>
@@ -4886,7 +5037,7 @@
       </p:pic>
       <p:pic>
         <p:nvPicPr>
-          <p:cNvPr id="3" name="photo border" descr="013.png"/>
+          <p:cNvPr id="3" name="photo border" descr="006.png"/>
           <p:cNvPicPr>
             <a:picLocks noChangeAspect="1"/>
           </p:cNvPicPr>
@@ -4908,33 +5059,34 @@
           </a:prstGeom>
         </p:spPr>
       </p:pic>
-      <p:pic>
-        <p:nvPicPr>
-          <p:cNvPr id="4" name="PHOTO: Option 4" descr="014.png"/>
-          <p:cNvPicPr>
-            <a:picLocks noChangeAspect="1"/>
-          </p:cNvPicPr>
+      <p:sp>
+        <p:nvSpPr>
+          <p:cNvPr id="4" name="PHOTO: Option 4"/>
+          <p:cNvSpPr/>
           <p:nvPr/>
-        </p:nvPicPr>
-        <p:blipFill>
-          <a:blip r:embed="rId4"/>
-          <a:stretch>
-            <a:fillRect/>
-          </a:stretch>
-        </p:blipFill>
-        <p:spPr>
-          <a:xfrm rot="180000">
+        </p:nvSpPr>
+        <p:spPr>
+          <a:xfrm rot="-180000">
             <a:off x="1714500" y="2952750"/>
             <a:ext cx="6858000" cy="8572500"/>
           </a:xfrm>
           <a:prstGeom prst="rect">
             <a:avLst/>
           </a:prstGeom>
-        </p:spPr>
-      </p:pic>
+          <a:blipFill rotWithShape="1">
+            <a:blip r:embed="rId4"/>
+            <a:stretch>
+              <a:fillRect/>
+            </a:stretch>
+          </a:blipFill>
+          <a:ln>
+            <a:noFill/>
+          </a:ln>
+        </p:spPr>
+      </p:sp>
       <p:pic>
         <p:nvPicPr>
-          <p:cNvPr id="5" name="paint chip" descr="015.png"/>
+          <p:cNvPr id="5" name="paint chip" descr="007.png"/>
           <p:cNvPicPr>
             <a:picLocks noChangeAspect="1"/>
           </p:cNvPicPr>
@@ -5057,7 +5209,7 @@
       </p:pic>
       <p:pic>
         <p:nvPicPr>
-          <p:cNvPr id="3" name="photo border" descr="016.png"/>
+          <p:cNvPr id="3" name="photo border" descr="008.png"/>
           <p:cNvPicPr>
             <a:picLocks noChangeAspect="1"/>
           </p:cNvPicPr>
@@ -5079,33 +5231,34 @@
           </a:prstGeom>
         </p:spPr>
       </p:pic>
-      <p:pic>
-        <p:nvPicPr>
-          <p:cNvPr id="4" name="PHOTO: Option 5" descr="017.png"/>
-          <p:cNvPicPr>
-            <a:picLocks noChangeAspect="1"/>
-          </p:cNvPicPr>
+      <p:sp>
+        <p:nvSpPr>
+          <p:cNvPr id="4" name="PHOTO: Option 5"/>
+          <p:cNvSpPr/>
           <p:nvPr/>
-        </p:nvPicPr>
-        <p:blipFill>
-          <a:blip r:embed="rId4"/>
-          <a:stretch>
-            <a:fillRect/>
-          </a:stretch>
-        </p:blipFill>
-        <p:spPr>
-          <a:xfrm rot="180000">
+        </p:nvSpPr>
+        <p:spPr>
+          <a:xfrm rot="-180000">
             <a:off x="666750" y="3333750"/>
             <a:ext cx="4191000" cy="7810500"/>
           </a:xfrm>
           <a:prstGeom prst="rect">
             <a:avLst/>
           </a:prstGeom>
-        </p:spPr>
-      </p:pic>
+          <a:blipFill rotWithShape="1">
+            <a:blip r:embed="rId4"/>
+            <a:stretch>
+              <a:fillRect/>
+            </a:stretch>
+          </a:blipFill>
+          <a:ln>
+            <a:noFill/>
+          </a:ln>
+        </p:spPr>
+      </p:sp>
       <p:pic>
         <p:nvPicPr>
-          <p:cNvPr id="5" name="photo border" descr="016.png"/>
+          <p:cNvPr id="5" name="photo border" descr="008.png"/>
           <p:cNvPicPr>
             <a:picLocks noChangeAspect="1"/>
           </p:cNvPicPr>
@@ -5127,30 +5280,31 @@
           </a:prstGeom>
         </p:spPr>
       </p:pic>
-      <p:pic>
-        <p:nvPicPr>
-          <p:cNvPr id="6" name="PHOTO: Option 6" descr="017.png"/>
-          <p:cNvPicPr>
-            <a:picLocks noChangeAspect="1"/>
-          </p:cNvPicPr>
+      <p:sp>
+        <p:nvSpPr>
+          <p:cNvPr id="6" name="PHOTO: Option 6"/>
+          <p:cNvSpPr/>
           <p:nvPr/>
-        </p:nvPicPr>
-        <p:blipFill>
-          <a:blip r:embed="rId4"/>
-          <a:stretch>
-            <a:fillRect/>
-          </a:stretch>
-        </p:blipFill>
-        <p:spPr>
-          <a:xfrm rot="21420000">
+        </p:nvSpPr>
+        <p:spPr>
+          <a:xfrm rot="180000">
             <a:off x="5429250" y="3714750"/>
             <a:ext cx="4191000" cy="7810500"/>
           </a:xfrm>
           <a:prstGeom prst="rect">
             <a:avLst/>
           </a:prstGeom>
-        </p:spPr>
-      </p:pic>
+          <a:blipFill rotWithShape="1">
+            <a:blip r:embed="rId4"/>
+            <a:stretch>
+              <a:fillRect/>
+            </a:stretch>
+          </a:blipFill>
+          <a:ln>
+            <a:noFill/>
+          </a:ln>
+        </p:spPr>
+      </p:sp>
       <p:sp>
         <p:nvSpPr>
           <p:cNvPr id="7" name="TEXT: [OPTION 5]"/>
@@ -5366,7 +5520,7 @@
       </p:pic>
       <p:pic>
         <p:nvPicPr>
-          <p:cNvPr id="3" name="paint chip" descr="008.png"/>
+          <p:cNvPr id="3" name="paint chip" descr="003.png"/>
           <p:cNvPicPr>
             <a:picLocks noChangeAspect="1"/>
           </p:cNvPicPr>
@@ -5390,7 +5544,7 @@
       </p:pic>
       <p:pic>
         <p:nvPicPr>
-          <p:cNvPr id="4" name="paint chip" descr="021.png"/>
+          <p:cNvPr id="4" name="paint chip" descr="011.png"/>
           <p:cNvPicPr>
             <a:picLocks noChangeAspect="1"/>
           </p:cNvPicPr>
@@ -5414,7 +5568,7 @@
       </p:pic>
       <p:pic>
         <p:nvPicPr>
-          <p:cNvPr id="5" name="paint chip" descr="022.png"/>
+          <p:cNvPr id="5" name="paint chip" descr="012.png"/>
           <p:cNvPicPr>
             <a:picLocks noChangeAspect="1"/>
           </p:cNvPicPr>
@@ -5438,7 +5592,7 @@
       </p:pic>
       <p:pic>
         <p:nvPicPr>
-          <p:cNvPr id="6" name="paint chip" descr="015.png"/>
+          <p:cNvPr id="6" name="paint chip" descr="007.png"/>
           <p:cNvPicPr>
             <a:picLocks noChangeAspect="1"/>
           </p:cNvPicPr>
@@ -5462,7 +5616,7 @@
       </p:pic>
       <p:pic>
         <p:nvPicPr>
-          <p:cNvPr id="7" name="paint chip" descr="024.png"/>
+          <p:cNvPr id="7" name="paint chip" descr="014.png"/>
           <p:cNvPicPr>
             <a:picLocks noChangeAspect="1"/>
           </p:cNvPicPr>
@@ -5486,7 +5640,7 @@
       </p:pic>
       <p:pic>
         <p:nvPicPr>
-          <p:cNvPr id="8" name="paint chip" descr="025.png"/>
+          <p:cNvPr id="8" name="paint chip" descr="015.png"/>
           <p:cNvPicPr>
             <a:picLocks noChangeAspect="1"/>
           </p:cNvPicPr>
@@ -5565,54 +5719,627 @@
           </a:p>
         </p:txBody>
       </p:sp>
-      <p:pic>
-        <p:nvPicPr>
-          <p:cNvPr id="10" name="your favourite" descr="026.png"/>
-          <p:cNvPicPr>
-            <a:picLocks noChangeAspect="1"/>
-          </p:cNvPicPr>
+      <p:sp>
+        <p:nvSpPr>
+          <p:cNvPr id="10" name="LETTERING: your favourite"/>
+          <p:cNvSpPr txBox="1"/>
           <p:nvPr/>
-        </p:nvPicPr>
-        <p:blipFill>
-          <a:blip r:embed="rId9"/>
-          <a:stretch>
-            <a:fillRect/>
-          </a:stretch>
-        </p:blipFill>
+        </p:nvSpPr>
         <p:spPr>
           <a:xfrm>
-            <a:off x="704850" y="2833688"/>
-            <a:ext cx="8877300" cy="1952625"/>
+            <a:off x="1000125" y="3067050"/>
+            <a:ext cx="8286750" cy="1485900"/>
           </a:xfrm>
           <a:prstGeom prst="rect">
             <a:avLst/>
           </a:prstGeom>
-        </p:spPr>
-      </p:pic>
-      <p:pic>
-        <p:nvPicPr>
-          <p:cNvPr id="11" name="heart" descr="027.png"/>
-          <p:cNvPicPr>
-            <a:picLocks noChangeAspect="1"/>
-          </p:cNvPicPr>
+          <a:noFill/>
+        </p:spPr>
+        <p:txBody>
+          <a:bodyPr wrap="none" anchor="t" lIns="0" rIns="0" tIns="0" bIns="0">
+            <a:spAutoFit/>
+          </a:bodyPr>
+          <a:lstStyle/>
+          <a:p>
+            <a:pPr algn="ctr">
+              <a:lnSpc>
+                <a:spcPct val="120000"/>
+              </a:lnSpc>
+            </a:pPr>
+            <a:r>
+              <a:rPr sz="9750" i="0">
+                <a:solidFill>
+                  <a:srgbClr val="7A1732"/>
+                </a:solidFill>
+                <a:latin typeface="DM Serif Display"/>
+              </a:rPr>
+              <a:t>your </a:t>
+            </a:r>
+            <a:r>
+              <a:rPr sz="9750" i="1">
+                <a:solidFill>
+                  <a:srgbClr val="7A1732"/>
+                </a:solidFill>
+                <a:latin typeface="DM Serif Display"/>
+              </a:rPr>
+              <a:t>favourite</a:t>
+            </a:r>
+          </a:p>
+        </p:txBody>
+      </p:sp>
+      <p:sp>
+        <p:nvSpPr>
+          <p:cNvPr id="11" name="heart"/>
+          <p:cNvSpPr/>
           <p:nvPr/>
-        </p:nvPicPr>
-        <p:blipFill>
-          <a:blip r:embed="rId10"/>
-          <a:stretch>
-            <a:fillRect/>
-          </a:stretch>
-        </p:blipFill>
-        <p:spPr>
-          <a:xfrm rot="21120000">
+        </p:nvSpPr>
+        <p:spPr>
+          <a:xfrm rot="480000">
             <a:off x="4333875" y="11553825"/>
             <a:ext cx="1619250" cy="1847850"/>
           </a:xfrm>
-          <a:prstGeom prst="rect">
+          <a:custGeom>
             <a:avLst/>
-          </a:prstGeom>
-        </p:spPr>
-      </p:pic>
+            <a:gdLst/>
+            <a:ahLst/>
+            <a:cxnLst/>
+            <a:rect l="0" t="0" r="r" b="b"/>
+            <a:pathLst>
+              <a:path w="1619250" h="1847850">
+                <a:moveTo>
+                  <a:pt x="752475" y="1821529"/>
+                </a:moveTo>
+                <a:cubicBezTo>
+                  <a:pt x="734139" y="1807192"/>
+                  <a:pt x="678418" y="1752626"/>
+                  <a:pt x="628650" y="1700270"/>
+                </a:cubicBezTo>
+                <a:cubicBezTo>
+                  <a:pt x="578881" y="1647914"/>
+                  <a:pt x="528366" y="1597120"/>
+                  <a:pt x="516393" y="1587394"/>
+                </a:cubicBezTo>
+                <a:cubicBezTo>
+                  <a:pt x="502332" y="1575972"/>
+                  <a:pt x="496567" y="1563587"/>
+                  <a:pt x="500111" y="1552419"/>
+                </a:cubicBezTo>
+                <a:cubicBezTo>
+                  <a:pt x="503130" y="1542909"/>
+                  <a:pt x="501139" y="1532371"/>
+                  <a:pt x="495687" y="1529001"/>
+                </a:cubicBezTo>
+                <a:cubicBezTo>
+                  <a:pt x="490235" y="1525632"/>
+                  <a:pt x="485775" y="1528162"/>
+                  <a:pt x="485775" y="1534623"/>
+                </a:cubicBezTo>
+                <a:cubicBezTo>
+                  <a:pt x="485775" y="1541087"/>
+                  <a:pt x="475008" y="1536255"/>
+                  <a:pt x="461836" y="1523881"/>
+                </a:cubicBezTo>
+                <a:cubicBezTo>
+                  <a:pt x="446212" y="1509203"/>
+                  <a:pt x="441137" y="1498152"/>
+                  <a:pt x="447226" y="1492063"/>
+                </a:cubicBezTo>
+                <a:cubicBezTo>
+                  <a:pt x="453315" y="1485974"/>
+                  <a:pt x="445916" y="1470533"/>
+                  <a:pt x="425921" y="1447607"/>
+                </a:cubicBezTo>
+                <a:cubicBezTo>
+                  <a:pt x="409072" y="1428288"/>
+                  <a:pt x="378142" y="1387743"/>
+                  <a:pt x="357187" y="1357509"/>
+                </a:cubicBezTo>
+                <a:cubicBezTo>
+                  <a:pt x="336232" y="1327275"/>
+                  <a:pt x="311364" y="1293430"/>
+                  <a:pt x="301924" y="1282300"/>
+                </a:cubicBezTo>
+                <a:cubicBezTo>
+                  <a:pt x="278405" y="1254567"/>
+                  <a:pt x="329951" y="1339750"/>
+                  <a:pt x="361726" y="1381125"/>
+                </a:cubicBezTo>
+                <a:cubicBezTo>
+                  <a:pt x="396217" y="1426036"/>
+                  <a:pt x="402793" y="1438275"/>
+                  <a:pt x="392435" y="1438275"/>
+                </a:cubicBezTo>
+                <a:cubicBezTo>
+                  <a:pt x="387629" y="1438275"/>
+                  <a:pt x="368051" y="1415772"/>
+                  <a:pt x="348928" y="1388268"/>
+                </a:cubicBezTo>
+                <a:cubicBezTo>
+                  <a:pt x="329805" y="1360765"/>
+                  <a:pt x="298510" y="1317507"/>
+                  <a:pt x="279382" y="1292140"/>
+                </a:cubicBezTo>
+                <a:cubicBezTo>
+                  <a:pt x="257579" y="1263225"/>
+                  <a:pt x="248423" y="1243658"/>
+                  <a:pt x="254840" y="1239692"/>
+                </a:cubicBezTo>
+                <a:cubicBezTo>
+                  <a:pt x="261915" y="1235320"/>
+                  <a:pt x="261212" y="1228082"/>
+                  <a:pt x="252562" y="1216253"/>
+                </a:cubicBezTo>
+                <a:cubicBezTo>
+                  <a:pt x="243582" y="1203972"/>
+                  <a:pt x="238902" y="1202578"/>
+                  <a:pt x="235990" y="1211316"/>
+                </a:cubicBezTo>
+                <a:cubicBezTo>
+                  <a:pt x="224239" y="1246570"/>
+                  <a:pt x="63749" y="934018"/>
+                  <a:pt x="61519" y="871537"/>
+                </a:cubicBezTo>
+                <a:cubicBezTo>
+                  <a:pt x="59492" y="814744"/>
+                  <a:pt x="58133" y="809408"/>
+                  <a:pt x="46348" y="812006"/>
+                </a:cubicBezTo>
+                <a:cubicBezTo>
+                  <a:pt x="40398" y="813317"/>
+                  <a:pt x="30260" y="791682"/>
+                  <a:pt x="23777" y="763838"/>
+                </a:cubicBezTo>
+                <a:cubicBezTo>
+                  <a:pt x="13911" y="721465"/>
+                  <a:pt x="14118" y="714099"/>
+                  <a:pt x="25054" y="718295"/>
+                </a:cubicBezTo>
+                <a:cubicBezTo>
+                  <a:pt x="39901" y="723993"/>
+                  <a:pt x="43997" y="681044"/>
+                  <a:pt x="29463" y="672061"/>
+                </a:cubicBezTo>
+                <a:cubicBezTo>
+                  <a:pt x="24713" y="669125"/>
+                  <a:pt x="23069" y="675302"/>
+                  <a:pt x="25811" y="685786"/>
+                </a:cubicBezTo>
+                <a:cubicBezTo>
+                  <a:pt x="28553" y="696271"/>
+                  <a:pt x="26562" y="704849"/>
+                  <a:pt x="21388" y="704849"/>
+                </a:cubicBezTo>
+                <a:cubicBezTo>
+                  <a:pt x="-1538" y="704850"/>
+                  <a:pt x="-2076" y="567062"/>
+                  <a:pt x="20532" y="485775"/>
+                </a:cubicBezTo>
+                <a:cubicBezTo>
+                  <a:pt x="76364" y="285034"/>
+                  <a:pt x="192519" y="191389"/>
+                  <a:pt x="351420" y="219010"/>
+                </a:cubicBezTo>
+                <a:cubicBezTo>
+                  <a:pt x="479464" y="241268"/>
+                  <a:pt x="625358" y="336169"/>
+                  <a:pt x="712472" y="453867"/>
+                </a:cubicBezTo>
+                <a:lnTo>
+                  <a:pt x="757079" y="514135"/>
+                </a:lnTo>
+                <a:lnTo>
+                  <a:pt x="777708" y="467392"/>
+                </a:lnTo>
+                <a:cubicBezTo>
+                  <a:pt x="829685" y="349620"/>
+                  <a:pt x="980247" y="176660"/>
+                  <a:pt x="1101234" y="95739"/>
+                </a:cubicBezTo>
+                <a:cubicBezTo>
+                  <a:pt x="1235280" y="6083"/>
+                  <a:pt x="1403931" y="-22703"/>
+                  <a:pt x="1494725" y="28575"/>
+                </a:cubicBezTo>
+                <a:cubicBezTo>
+                  <a:pt x="1535960" y="51863"/>
+                  <a:pt x="1555743" y="76200"/>
+                  <a:pt x="1533439" y="76200"/>
+                </a:cubicBezTo>
+                <a:cubicBezTo>
+                  <a:pt x="1527281" y="76199"/>
+                  <a:pt x="1511267" y="67567"/>
+                  <a:pt x="1497854" y="57016"/>
+                </a:cubicBezTo>
+                <a:cubicBezTo>
+                  <a:pt x="1458914" y="26386"/>
+                  <a:pt x="1461256" y="43295"/>
+                  <a:pt x="1500757" y="77978"/>
+                </a:cubicBezTo>
+                <a:cubicBezTo>
+                  <a:pt x="1538456" y="111078"/>
+                  <a:pt x="1573822" y="179576"/>
+                  <a:pt x="1585174" y="241479"/>
+                </a:cubicBezTo>
+                <a:cubicBezTo>
+                  <a:pt x="1588875" y="261660"/>
+                  <a:pt x="1594144" y="275930"/>
+                  <a:pt x="1596883" y="273191"/>
+                </a:cubicBezTo>
+                <a:cubicBezTo>
+                  <a:pt x="1605213" y="264861"/>
+                  <a:pt x="1581468" y="166577"/>
+                  <a:pt x="1561810" y="128018"/>
+                </a:cubicBezTo>
+                <a:cubicBezTo>
+                  <a:pt x="1540536" y="86292"/>
+                  <a:pt x="1546153" y="71019"/>
+                  <a:pt x="1571344" y="102089"/>
+                </a:cubicBezTo>
+                <a:cubicBezTo>
+                  <a:pt x="1605875" y="144680"/>
+                  <a:pt x="1622045" y="245680"/>
+                  <a:pt x="1610137" y="344401"/>
+                </a:cubicBezTo>
+                <a:cubicBezTo>
+                  <a:pt x="1591892" y="495658"/>
+                  <a:pt x="1478679" y="844177"/>
+                  <a:pt x="1458431" y="811416"/>
+                </a:cubicBezTo>
+                <a:cubicBezTo>
+                  <a:pt x="1453376" y="803236"/>
+                  <a:pt x="1447589" y="807767"/>
+                  <a:pt x="1439772" y="826023"/>
+                </a:cubicBezTo>
+                <a:cubicBezTo>
+                  <a:pt x="1429282" y="850521"/>
+                  <a:pt x="1429513" y="851113"/>
+                  <a:pt x="1442882" y="833998"/>
+                </a:cubicBezTo>
+                <a:cubicBezTo>
+                  <a:pt x="1455757" y="817515"/>
+                  <a:pt x="1457325" y="817291"/>
+                  <a:pt x="1457325" y="831933"/>
+                </a:cubicBezTo>
+                <a:cubicBezTo>
+                  <a:pt x="1457324" y="854822"/>
+                  <a:pt x="1407604" y="950285"/>
+                  <a:pt x="1402874" y="936476"/>
+                </a:cubicBezTo>
+                <a:cubicBezTo>
+                  <a:pt x="1400753" y="930283"/>
+                  <a:pt x="1406023" y="911668"/>
+                  <a:pt x="1414586" y="895110"/>
+                </a:cubicBezTo>
+                <a:cubicBezTo>
+                  <a:pt x="1423148" y="878552"/>
+                  <a:pt x="1428682" y="863532"/>
+                  <a:pt x="1426883" y="861733"/>
+                </a:cubicBezTo>
+                <a:cubicBezTo>
+                  <a:pt x="1425084" y="859934"/>
+                  <a:pt x="1394280" y="916499"/>
+                  <a:pt x="1358429" y="987433"/>
+                </a:cubicBezTo>
+                <a:cubicBezTo>
+                  <a:pt x="1295547" y="1111853"/>
+                  <a:pt x="1249521" y="1196741"/>
+                  <a:pt x="1206945" y="1266825"/>
+                </a:cubicBezTo>
+                <a:cubicBezTo>
+                  <a:pt x="1191204" y="1292737"/>
+                  <a:pt x="1190313" y="1297251"/>
+                  <a:pt x="1202946" y="1287089"/>
+                </a:cubicBezTo>
+                <a:cubicBezTo>
+                  <a:pt x="1235587" y="1260837"/>
+                  <a:pt x="1218866" y="1297993"/>
+                  <a:pt x="1137667" y="1432152"/>
+                </a:cubicBezTo>
+                <a:cubicBezTo>
+                  <a:pt x="1014805" y="1635150"/>
+                  <a:pt x="954562" y="1728100"/>
+                  <a:pt x="943458" y="1731801"/>
+                </a:cubicBezTo>
+                <a:cubicBezTo>
+                  <a:pt x="925135" y="1737908"/>
+                  <a:pt x="933337" y="1719932"/>
+                  <a:pt x="986118" y="1638300"/>
+                </a:cubicBezTo>
+                <a:cubicBezTo>
+                  <a:pt x="1014910" y="1593770"/>
+                  <a:pt x="1045081" y="1542970"/>
+                  <a:pt x="1053166" y="1525410"/>
+                </a:cubicBezTo>
+                <a:cubicBezTo>
+                  <a:pt x="1061251" y="1507850"/>
+                  <a:pt x="1075127" y="1485656"/>
+                  <a:pt x="1084002" y="1476090"/>
+                </a:cubicBezTo>
+                <a:cubicBezTo>
+                  <a:pt x="1104689" y="1453791"/>
+                  <a:pt x="1140362" y="1391519"/>
+                  <a:pt x="1123398" y="1407318"/>
+                </a:cubicBezTo>
+                <a:cubicBezTo>
+                  <a:pt x="1095979" y="1432855"/>
+                  <a:pt x="1096341" y="1416767"/>
+                  <a:pt x="1124436" y="1361111"/>
+                </a:cubicBezTo>
+                <a:cubicBezTo>
+                  <a:pt x="1172392" y="1266110"/>
+                  <a:pt x="1149694" y="1286580"/>
+                  <a:pt x="1079125" y="1401974"/>
+                </a:cubicBezTo>
+                <a:cubicBezTo>
+                  <a:pt x="916213" y="1668368"/>
+                  <a:pt x="900875" y="1697177"/>
+                  <a:pt x="900486" y="1737501"/>
+                </a:cubicBezTo>
+                <a:cubicBezTo>
+                  <a:pt x="900174" y="1769937"/>
+                  <a:pt x="896942" y="1776412"/>
+                  <a:pt x="881062" y="1776412"/>
+                </a:cubicBezTo>
+                <a:cubicBezTo>
+                  <a:pt x="852059" y="1776412"/>
+                  <a:pt x="838200" y="1789290"/>
+                  <a:pt x="838200" y="1816240"/>
+                </a:cubicBezTo>
+                <a:cubicBezTo>
+                  <a:pt x="838200" y="1837258"/>
+                  <a:pt x="836135" y="1838944"/>
+                  <a:pt x="823375" y="1828353"/>
+                </a:cubicBezTo>
+                <a:cubicBezTo>
+                  <a:pt x="811179" y="1818232"/>
+                  <a:pt x="809067" y="1818347"/>
+                  <a:pt x="811468" y="1829003"/>
+                </a:cubicBezTo>
+                <a:cubicBezTo>
+                  <a:pt x="816664" y="1852063"/>
+                  <a:pt x="786664" y="1848262"/>
+                  <a:pt x="752475" y="1821529"/>
+                </a:cubicBezTo>
+                <a:close/>
+                <a:moveTo>
+                  <a:pt x="852487" y="1460229"/>
+                </a:moveTo>
+                <a:cubicBezTo>
+                  <a:pt x="889158" y="1394080"/>
+                  <a:pt x="946153" y="1292428"/>
+                  <a:pt x="979141" y="1234335"/>
+                </a:cubicBezTo>
+                <a:cubicBezTo>
+                  <a:pt x="1205102" y="836418"/>
+                  <a:pt x="1371599" y="435742"/>
+                  <a:pt x="1371600" y="289884"/>
+                </a:cubicBezTo>
+                <a:cubicBezTo>
+                  <a:pt x="1371600" y="212500"/>
+                  <a:pt x="1347809" y="206242"/>
+                  <a:pt x="1247503" y="257239"/>
+                </a:cubicBezTo>
+                <a:cubicBezTo>
+                  <a:pt x="1099756" y="332356"/>
+                  <a:pt x="938400" y="535001"/>
+                  <a:pt x="885405" y="711993"/>
+                </a:cubicBezTo>
+                <a:cubicBezTo>
+                  <a:pt x="872441" y="755290"/>
+                  <a:pt x="851976" y="768442"/>
+                  <a:pt x="859597" y="728579"/>
+                </a:cubicBezTo>
+                <a:cubicBezTo>
+                  <a:pt x="863448" y="708431"/>
+                  <a:pt x="861971" y="706504"/>
+                  <a:pt x="850178" y="716291"/>
+                </a:cubicBezTo>
+                <a:cubicBezTo>
+                  <a:pt x="839315" y="725307"/>
+                  <a:pt x="837615" y="740479"/>
+                  <a:pt x="842565" y="784234"/>
+                </a:cubicBezTo>
+                <a:lnTo>
+                  <a:pt x="848939" y="840569"/>
+                </a:lnTo>
+                <a:lnTo>
+                  <a:pt x="824519" y="834440"/>
+                </a:lnTo>
+                <a:cubicBezTo>
+                  <a:pt x="803266" y="829106"/>
+                  <a:pt x="800100" y="831350"/>
+                  <a:pt x="800100" y="851743"/>
+                </a:cubicBezTo>
+                <a:cubicBezTo>
+                  <a:pt x="800100" y="879599"/>
+                  <a:pt x="782349" y="893679"/>
+                  <a:pt x="770605" y="875139"/>
+                </a:cubicBezTo>
+                <a:cubicBezTo>
+                  <a:pt x="764585" y="865633"/>
+                  <a:pt x="762251" y="865296"/>
+                  <a:pt x="762145" y="873918"/>
+                </a:cubicBezTo>
+                <a:cubicBezTo>
+                  <a:pt x="761912" y="892949"/>
+                  <a:pt x="732120" y="887656"/>
+                  <a:pt x="726890" y="867655"/>
+                </a:cubicBezTo>
+                <a:cubicBezTo>
+                  <a:pt x="724276" y="857662"/>
+                  <a:pt x="714567" y="847506"/>
+                  <a:pt x="705314" y="845086"/>
+                </a:cubicBezTo>
+                <a:cubicBezTo>
+                  <a:pt x="696060" y="842666"/>
+                  <a:pt x="685630" y="829297"/>
+                  <a:pt x="682137" y="815377"/>
+                </a:cubicBezTo>
+                <a:cubicBezTo>
+                  <a:pt x="639319" y="644777"/>
+                  <a:pt x="434917" y="409574"/>
+                  <a:pt x="329476" y="409575"/>
+                </a:cubicBezTo>
+                <a:cubicBezTo>
+                  <a:pt x="301171" y="409575"/>
+                  <a:pt x="262459" y="456399"/>
+                  <a:pt x="252698" y="502443"/>
+                </a:cubicBezTo>
+                <a:cubicBezTo>
+                  <a:pt x="246334" y="532465"/>
+                  <a:pt x="229284" y="545578"/>
+                  <a:pt x="227930" y="521493"/>
+                </a:cubicBezTo>
+                <a:cubicBezTo>
+                  <a:pt x="226223" y="491132"/>
+                  <a:pt x="210812" y="552803"/>
+                  <a:pt x="210219" y="592369"/>
+                </a:cubicBezTo>
+                <a:cubicBezTo>
+                  <a:pt x="209448" y="643809"/>
+                  <a:pt x="225774" y="663502"/>
+                  <a:pt x="230575" y="616924"/>
+                </a:cubicBezTo>
+                <a:cubicBezTo>
+                  <a:pt x="233001" y="593394"/>
+                  <a:pt x="236805" y="603239"/>
+                  <a:pt x="246147" y="657225"/>
+                </a:cubicBezTo>
+                <a:cubicBezTo>
+                  <a:pt x="280782" y="857365"/>
+                  <a:pt x="411601" y="1108385"/>
+                  <a:pt x="637666" y="1408480"/>
+                </a:cubicBezTo>
+                <a:cubicBezTo>
+                  <a:pt x="666759" y="1447099"/>
+                  <a:pt x="696991" y="1487819"/>
+                  <a:pt x="704850" y="1498967"/>
+                </a:cubicBezTo>
+                <a:cubicBezTo>
+                  <a:pt x="726613" y="1529844"/>
+                  <a:pt x="773878" y="1581191"/>
+                  <a:pt x="780199" y="1580824"/>
+                </a:cubicBezTo>
+                <a:cubicBezTo>
+                  <a:pt x="783286" y="1580645"/>
+                  <a:pt x="815816" y="1526377"/>
+                  <a:pt x="852487" y="1460229"/>
+                </a:cubicBezTo>
+                <a:close/>
+                <a:moveTo>
+                  <a:pt x="507695" y="1473993"/>
+                </a:moveTo>
+                <a:cubicBezTo>
+                  <a:pt x="502752" y="1467445"/>
+                  <a:pt x="483059" y="1442504"/>
+                  <a:pt x="463933" y="1418569"/>
+                </a:cubicBezTo>
+                <a:cubicBezTo>
+                  <a:pt x="396647" y="1334366"/>
+                  <a:pt x="278912" y="1161803"/>
+                  <a:pt x="237316" y="1086421"/>
+                </a:cubicBezTo>
+                <a:cubicBezTo>
+                  <a:pt x="214186" y="1044504"/>
+                  <a:pt x="192237" y="1010082"/>
+                  <a:pt x="188541" y="1009929"/>
+                </a:cubicBezTo>
+                <a:cubicBezTo>
+                  <a:pt x="176412" y="1009425"/>
+                  <a:pt x="209604" y="1089247"/>
+                  <a:pt x="229061" y="1107374"/>
+                </a:cubicBezTo>
+                <a:cubicBezTo>
+                  <a:pt x="239517" y="1117115"/>
+                  <a:pt x="245636" y="1129027"/>
+                  <a:pt x="242658" y="1133845"/>
+                </a:cubicBezTo>
+                <a:cubicBezTo>
+                  <a:pt x="236254" y="1144207"/>
+                  <a:pt x="252608" y="1176994"/>
+                  <a:pt x="277513" y="1203727"/>
+                </a:cubicBezTo>
+                <a:cubicBezTo>
+                  <a:pt x="287282" y="1214212"/>
+                  <a:pt x="295275" y="1226009"/>
+                  <a:pt x="295275" y="1229941"/>
+                </a:cubicBezTo>
+                <a:cubicBezTo>
+                  <a:pt x="295275" y="1233874"/>
+                  <a:pt x="312684" y="1257711"/>
+                  <a:pt x="333962" y="1282914"/>
+                </a:cubicBezTo>
+                <a:cubicBezTo>
+                  <a:pt x="438764" y="1407044"/>
+                  <a:pt x="507967" y="1485900"/>
+                  <a:pt x="512102" y="1485900"/>
+                </a:cubicBezTo>
+                <a:cubicBezTo>
+                  <a:pt x="514621" y="1485900"/>
+                  <a:pt x="512638" y="1480542"/>
+                  <a:pt x="507695" y="1473993"/>
+                </a:cubicBezTo>
+                <a:close/>
+                <a:moveTo>
+                  <a:pt x="1245396" y="1219337"/>
+                </a:moveTo>
+                <a:cubicBezTo>
+                  <a:pt x="1279530" y="1157448"/>
+                  <a:pt x="1293412" y="1157333"/>
+                  <a:pt x="1262062" y="1219200"/>
+                </a:cubicBezTo>
+                <a:cubicBezTo>
+                  <a:pt x="1248789" y="1245393"/>
+                  <a:pt x="1233716" y="1266825"/>
+                  <a:pt x="1228567" y="1266825"/>
+                </a:cubicBezTo>
+                <a:cubicBezTo>
+                  <a:pt x="1223418" y="1266825"/>
+                  <a:pt x="1230991" y="1245455"/>
+                  <a:pt x="1245396" y="1219337"/>
+                </a:cubicBezTo>
+                <a:close/>
+                <a:moveTo>
+                  <a:pt x="1561201" y="254793"/>
+                </a:moveTo>
+                <a:cubicBezTo>
+                  <a:pt x="1558397" y="180549"/>
+                  <a:pt x="1540331" y="131525"/>
+                  <a:pt x="1504162" y="100012"/>
+                </a:cubicBezTo>
+                <a:lnTo>
+                  <a:pt x="1482298" y="80962"/>
+                </a:lnTo>
+                <a:lnTo>
+                  <a:pt x="1503349" y="111289"/>
+                </a:lnTo>
+                <a:cubicBezTo>
+                  <a:pt x="1534654" y="156387"/>
+                  <a:pt x="1552575" y="215134"/>
+                  <a:pt x="1552575" y="272660"/>
+                </a:cubicBezTo>
+                <a:cubicBezTo>
+                  <a:pt x="1552575" y="300814"/>
+                  <a:pt x="1555102" y="323850"/>
+                  <a:pt x="1558192" y="323850"/>
+                </a:cubicBezTo>
+                <a:cubicBezTo>
+                  <a:pt x="1561282" y="323850"/>
+                  <a:pt x="1562636" y="292774"/>
+                  <a:pt x="1561201" y="254793"/>
+                </a:cubicBezTo>
+                <a:close/>
+              </a:path>
+            </a:pathLst>
+          </a:custGeom>
+          <a:solidFill>
+            <a:srgbClr val="7A1732"/>
+          </a:solidFill>
+          <a:ln>
+            <a:noFill/>
+          </a:ln>
+        </p:spPr>
+      </p:sp>
     </p:spTree>
   </p:cSld>
   <p:clrMapOvr>
@@ -5657,7 +6384,7 @@
       </p:pic>
       <p:pic>
         <p:nvPicPr>
-          <p:cNvPr id="3" name="shelf" descr="028.png"/>
+          <p:cNvPr id="3" name="shelf" descr="016.png"/>
           <p:cNvPicPr>
             <a:picLocks noChangeAspect="1"/>
           </p:cNvPicPr>
@@ -5681,7 +6408,7 @@
       </p:pic>
       <p:pic>
         <p:nvPicPr>
-          <p:cNvPr id="4" name="photo border" descr="029.png"/>
+          <p:cNvPr id="4" name="photo border" descr="017.png"/>
           <p:cNvPicPr>
             <a:picLocks noChangeAspect="1"/>
           </p:cNvPicPr>
@@ -5703,33 +6430,34 @@
           </a:prstGeom>
         </p:spPr>
       </p:pic>
-      <p:pic>
-        <p:nvPicPr>
-          <p:cNvPr id="5" name="PHOTO: Option 1" descr="030.png"/>
-          <p:cNvPicPr>
-            <a:picLocks noChangeAspect="1"/>
-          </p:cNvPicPr>
+      <p:sp>
+        <p:nvSpPr>
+          <p:cNvPr id="5" name="PHOTO: Option 1"/>
+          <p:cNvSpPr/>
           <p:nvPr/>
-        </p:nvPicPr>
-        <p:blipFill>
-          <a:blip r:embed="rId5"/>
-          <a:stretch>
-            <a:fillRect/>
-          </a:stretch>
-        </p:blipFill>
-        <p:spPr>
-          <a:xfrm rot="180000">
+        </p:nvSpPr>
+        <p:spPr>
+          <a:xfrm rot="-180000">
             <a:off x="2047875" y="6048375"/>
             <a:ext cx="2190750" cy="1619250"/>
           </a:xfrm>
           <a:prstGeom prst="rect">
             <a:avLst/>
           </a:prstGeom>
-        </p:spPr>
-      </p:pic>
+          <a:blipFill rotWithShape="1">
+            <a:blip r:embed="rId5"/>
+            <a:stretch>
+              <a:fillRect/>
+            </a:stretch>
+          </a:blipFill>
+          <a:ln>
+            <a:noFill/>
+          </a:ln>
+        </p:spPr>
+      </p:sp>
       <p:pic>
         <p:nvPicPr>
-          <p:cNvPr id="6" name="photo border" descr="029.png"/>
+          <p:cNvPr id="6" name="photo border" descr="017.png"/>
           <p:cNvPicPr>
             <a:picLocks noChangeAspect="1"/>
           </p:cNvPicPr>
@@ -5751,33 +6479,34 @@
           </a:prstGeom>
         </p:spPr>
       </p:pic>
-      <p:pic>
-        <p:nvPicPr>
-          <p:cNvPr id="7" name="PHOTO: Option 2" descr="030.png"/>
-          <p:cNvPicPr>
-            <a:picLocks noChangeAspect="1"/>
-          </p:cNvPicPr>
+      <p:sp>
+        <p:nvSpPr>
+          <p:cNvPr id="7" name="PHOTO: Option 2"/>
+          <p:cNvSpPr/>
           <p:nvPr/>
-        </p:nvPicPr>
-        <p:blipFill>
-          <a:blip r:embed="rId5"/>
-          <a:stretch>
-            <a:fillRect/>
-          </a:stretch>
-        </p:blipFill>
-        <p:spPr>
-          <a:xfrm rot="21420000">
+        </p:nvSpPr>
+        <p:spPr>
+          <a:xfrm rot="180000">
             <a:off x="6048375" y="6048375"/>
             <a:ext cx="2190750" cy="1619250"/>
           </a:xfrm>
           <a:prstGeom prst="rect">
             <a:avLst/>
           </a:prstGeom>
-        </p:spPr>
-      </p:pic>
+          <a:blipFill rotWithShape="1">
+            <a:blip r:embed="rId5"/>
+            <a:stretch>
+              <a:fillRect/>
+            </a:stretch>
+          </a:blipFill>
+          <a:ln>
+            <a:noFill/>
+          </a:ln>
+        </p:spPr>
+      </p:sp>
       <p:pic>
         <p:nvPicPr>
-          <p:cNvPr id="8" name="photo border" descr="029.png"/>
+          <p:cNvPr id="8" name="photo border" descr="017.png"/>
           <p:cNvPicPr>
             <a:picLocks noChangeAspect="1"/>
           </p:cNvPicPr>
@@ -5799,33 +6528,34 @@
           </a:prstGeom>
         </p:spPr>
       </p:pic>
-      <p:pic>
-        <p:nvPicPr>
-          <p:cNvPr id="9" name="PHOTO: Option 3" descr="030.png"/>
-          <p:cNvPicPr>
-            <a:picLocks noChangeAspect="1"/>
-          </p:cNvPicPr>
+      <p:sp>
+        <p:nvSpPr>
+          <p:cNvPr id="9" name="PHOTO: Option 3"/>
+          <p:cNvSpPr/>
           <p:nvPr/>
-        </p:nvPicPr>
-        <p:blipFill>
-          <a:blip r:embed="rId5"/>
-          <a:stretch>
-            <a:fillRect/>
-          </a:stretch>
-        </p:blipFill>
-        <p:spPr>
-          <a:xfrm rot="180000">
+        </p:nvSpPr>
+        <p:spPr>
+          <a:xfrm rot="-180000">
             <a:off x="2047875" y="8810625"/>
             <a:ext cx="2190750" cy="1619250"/>
           </a:xfrm>
           <a:prstGeom prst="rect">
             <a:avLst/>
           </a:prstGeom>
-        </p:spPr>
-      </p:pic>
+          <a:blipFill rotWithShape="1">
+            <a:blip r:embed="rId5"/>
+            <a:stretch>
+              <a:fillRect/>
+            </a:stretch>
+          </a:blipFill>
+          <a:ln>
+            <a:noFill/>
+          </a:ln>
+        </p:spPr>
+      </p:sp>
       <p:pic>
         <p:nvPicPr>
-          <p:cNvPr id="10" name="photo border" descr="029.png"/>
+          <p:cNvPr id="10" name="photo border" descr="017.png"/>
           <p:cNvPicPr>
             <a:picLocks noChangeAspect="1"/>
           </p:cNvPicPr>
@@ -5847,33 +6577,34 @@
           </a:prstGeom>
         </p:spPr>
       </p:pic>
-      <p:pic>
-        <p:nvPicPr>
-          <p:cNvPr id="11" name="PHOTO: Option 4" descr="030.png"/>
-          <p:cNvPicPr>
-            <a:picLocks noChangeAspect="1"/>
-          </p:cNvPicPr>
+      <p:sp>
+        <p:nvSpPr>
+          <p:cNvPr id="11" name="PHOTO: Option 4"/>
+          <p:cNvSpPr/>
           <p:nvPr/>
-        </p:nvPicPr>
-        <p:blipFill>
-          <a:blip r:embed="rId5"/>
-          <a:stretch>
-            <a:fillRect/>
-          </a:stretch>
-        </p:blipFill>
-        <p:spPr>
-          <a:xfrm rot="21420000">
+        </p:nvSpPr>
+        <p:spPr>
+          <a:xfrm rot="180000">
             <a:off x="6048375" y="8810625"/>
             <a:ext cx="2190750" cy="1619250"/>
           </a:xfrm>
           <a:prstGeom prst="rect">
             <a:avLst/>
           </a:prstGeom>
-        </p:spPr>
-      </p:pic>
+          <a:blipFill rotWithShape="1">
+            <a:blip r:embed="rId5"/>
+            <a:stretch>
+              <a:fillRect/>
+            </a:stretch>
+          </a:blipFill>
+          <a:ln>
+            <a:noFill/>
+          </a:ln>
+        </p:spPr>
+      </p:sp>
       <p:pic>
         <p:nvPicPr>
-          <p:cNvPr id="12" name="photo border" descr="029.png"/>
+          <p:cNvPr id="12" name="photo border" descr="017.png"/>
           <p:cNvPicPr>
             <a:picLocks noChangeAspect="1"/>
           </p:cNvPicPr>
@@ -5895,33 +6626,34 @@
           </a:prstGeom>
         </p:spPr>
       </p:pic>
-      <p:pic>
-        <p:nvPicPr>
-          <p:cNvPr id="13" name="PHOTO: Option 5" descr="030.png"/>
-          <p:cNvPicPr>
-            <a:picLocks noChangeAspect="1"/>
-          </p:cNvPicPr>
+      <p:sp>
+        <p:nvSpPr>
+          <p:cNvPr id="13" name="PHOTO: Option 5"/>
+          <p:cNvSpPr/>
           <p:nvPr/>
-        </p:nvPicPr>
-        <p:blipFill>
-          <a:blip r:embed="rId5"/>
-          <a:stretch>
-            <a:fillRect/>
-          </a:stretch>
-        </p:blipFill>
-        <p:spPr>
-          <a:xfrm rot="180000">
+        </p:nvSpPr>
+        <p:spPr>
+          <a:xfrm rot="-180000">
             <a:off x="2047875" y="11477625"/>
             <a:ext cx="2190750" cy="1619250"/>
           </a:xfrm>
           <a:prstGeom prst="rect">
             <a:avLst/>
           </a:prstGeom>
-        </p:spPr>
-      </p:pic>
+          <a:blipFill rotWithShape="1">
+            <a:blip r:embed="rId5"/>
+            <a:stretch>
+              <a:fillRect/>
+            </a:stretch>
+          </a:blipFill>
+          <a:ln>
+            <a:noFill/>
+          </a:ln>
+        </p:spPr>
+      </p:sp>
       <p:pic>
         <p:nvPicPr>
-          <p:cNvPr id="14" name="photo border" descr="029.png"/>
+          <p:cNvPr id="14" name="photo border" descr="017.png"/>
           <p:cNvPicPr>
             <a:picLocks noChangeAspect="1"/>
           </p:cNvPicPr>
@@ -5943,54 +6675,70 @@
           </a:prstGeom>
         </p:spPr>
       </p:pic>
-      <p:pic>
-        <p:nvPicPr>
-          <p:cNvPr id="15" name="PHOTO: Option 6" descr="030.png"/>
-          <p:cNvPicPr>
-            <a:picLocks noChangeAspect="1"/>
-          </p:cNvPicPr>
+      <p:sp>
+        <p:nvSpPr>
+          <p:cNvPr id="15" name="PHOTO: Option 6"/>
+          <p:cNvSpPr/>
           <p:nvPr/>
-        </p:nvPicPr>
-        <p:blipFill>
-          <a:blip r:embed="rId5"/>
-          <a:stretch>
-            <a:fillRect/>
-          </a:stretch>
-        </p:blipFill>
-        <p:spPr>
-          <a:xfrm rot="21420000">
+        </p:nvSpPr>
+        <p:spPr>
+          <a:xfrm rot="180000">
             <a:off x="6048375" y="11477625"/>
             <a:ext cx="2190750" cy="1619250"/>
           </a:xfrm>
           <a:prstGeom prst="rect">
             <a:avLst/>
           </a:prstGeom>
-        </p:spPr>
-      </p:pic>
-      <p:pic>
-        <p:nvPicPr>
-          <p:cNvPr id="16" name="Comment" descr="041.png"/>
-          <p:cNvPicPr>
-            <a:picLocks noChangeAspect="1"/>
-          </p:cNvPicPr>
+          <a:blipFill rotWithShape="1">
+            <a:blip r:embed="rId5"/>
+            <a:stretch>
+              <a:fillRect/>
+            </a:stretch>
+          </a:blipFill>
+          <a:ln>
+            <a:noFill/>
+          </a:ln>
+        </p:spPr>
+      </p:sp>
+      <p:sp>
+        <p:nvSpPr>
+          <p:cNvPr id="16" name="LETTERING: Comment"/>
+          <p:cNvSpPr txBox="1"/>
           <p:nvPr/>
-        </p:nvPicPr>
-        <p:blipFill>
-          <a:blip r:embed="rId6"/>
-          <a:stretch>
-            <a:fillRect/>
-          </a:stretch>
-        </p:blipFill>
+        </p:nvSpPr>
         <p:spPr>
           <a:xfrm>
-            <a:off x="838200" y="895350"/>
-            <a:ext cx="8610600" cy="2019300"/>
+            <a:off x="857250" y="819150"/>
+            <a:ext cx="8572500" cy="2171700"/>
           </a:xfrm>
           <a:prstGeom prst="rect">
             <a:avLst/>
           </a:prstGeom>
-        </p:spPr>
-      </p:pic>
+          <a:noFill/>
+        </p:spPr>
+        <p:txBody>
+          <a:bodyPr wrap="none" anchor="t" lIns="0" rIns="0" tIns="0" bIns="0">
+            <a:spAutoFit/>
+          </a:bodyPr>
+          <a:lstStyle/>
+          <a:p>
+            <a:pPr algn="ctr">
+              <a:lnSpc>
+                <a:spcPct val="120000"/>
+              </a:lnSpc>
+            </a:pPr>
+            <a:r>
+              <a:rPr sz="14250" i="0">
+                <a:solidFill>
+                  <a:srgbClr val="7A1732"/>
+                </a:solidFill>
+                <a:latin typeface="DM Serif Display"/>
+              </a:rPr>
+              <a:t>Comment</a:t>
+            </a:r>
+          </a:p>
+        </p:txBody>
+      </p:sp>
       <p:sp>
         <p:nvSpPr>
           <p:cNvPr id="17" name="TEXT: &quot;[KEYWORD]&quot;"/>

--- a/automation/reel-template-pack/23-every-option-in-10-seconds/carousel/Template 23 - Every option in 10 seconds - Carousel.pptx
+++ b/automation/reel-template-pack/23-every-option-in-10-seconds/carousel/Template 23 - Every option in 10 seconds - Carousel.pptx
@@ -4452,7 +4452,7 @@
           <p:nvPr/>
         </p:nvSpPr>
         <p:spPr>
-          <a:xfrm rot="-120000">
+          <a:xfrm rot="120000">
             <a:off x="5095875" y="12272962"/>
             <a:ext cx="1619250" cy="504825"/>
           </a:xfrm>
@@ -5066,7 +5066,7 @@
           <p:nvPr/>
         </p:nvSpPr>
         <p:spPr>
-          <a:xfrm rot="-180000">
+          <a:xfrm rot="180000">
             <a:off x="1714500" y="2952750"/>
             <a:ext cx="6858000" cy="8572500"/>
           </a:xfrm>
@@ -5238,7 +5238,7 @@
           <p:nvPr/>
         </p:nvSpPr>
         <p:spPr>
-          <a:xfrm rot="-180000">
+          <a:xfrm rot="180000">
             <a:off x="666750" y="3333750"/>
             <a:ext cx="4191000" cy="7810500"/>
           </a:xfrm>
@@ -5287,7 +5287,7 @@
           <p:nvPr/>
         </p:nvSpPr>
         <p:spPr>
-          <a:xfrm rot="180000">
+          <a:xfrm rot="-180000">
             <a:off x="5429250" y="3714750"/>
             <a:ext cx="4191000" cy="7810500"/>
           </a:xfrm>
@@ -5774,7 +5774,7 @@
           <p:nvPr/>
         </p:nvSpPr>
         <p:spPr>
-          <a:xfrm rot="480000">
+          <a:xfrm rot="-480000">
             <a:off x="4333875" y="11553825"/>
             <a:ext cx="1619250" cy="1847850"/>
           </a:xfrm>
@@ -6437,7 +6437,7 @@
           <p:nvPr/>
         </p:nvSpPr>
         <p:spPr>
-          <a:xfrm rot="-180000">
+          <a:xfrm rot="180000">
             <a:off x="2047875" y="6048375"/>
             <a:ext cx="2190750" cy="1619250"/>
           </a:xfrm>
@@ -6486,7 +6486,7 @@
           <p:nvPr/>
         </p:nvSpPr>
         <p:spPr>
-          <a:xfrm rot="180000">
+          <a:xfrm rot="-180000">
             <a:off x="6048375" y="6048375"/>
             <a:ext cx="2190750" cy="1619250"/>
           </a:xfrm>
@@ -6535,7 +6535,7 @@
           <p:nvPr/>
         </p:nvSpPr>
         <p:spPr>
-          <a:xfrm rot="-180000">
+          <a:xfrm rot="180000">
             <a:off x="2047875" y="8810625"/>
             <a:ext cx="2190750" cy="1619250"/>
           </a:xfrm>
@@ -6584,7 +6584,7 @@
           <p:nvPr/>
         </p:nvSpPr>
         <p:spPr>
-          <a:xfrm rot="180000">
+          <a:xfrm rot="-180000">
             <a:off x="6048375" y="8810625"/>
             <a:ext cx="2190750" cy="1619250"/>
           </a:xfrm>
@@ -6633,7 +6633,7 @@
           <p:nvPr/>
         </p:nvSpPr>
         <p:spPr>
-          <a:xfrm rot="-180000">
+          <a:xfrm rot="180000">
             <a:off x="2047875" y="11477625"/>
             <a:ext cx="2190750" cy="1619250"/>
           </a:xfrm>
@@ -6682,7 +6682,7 @@
           <p:nvPr/>
         </p:nvSpPr>
         <p:spPr>
-          <a:xfrm rot="180000">
+          <a:xfrm rot="-180000">
             <a:off x="6048375" y="11477625"/>
             <a:ext cx="2190750" cy="1619250"/>
           </a:xfrm>
